--- a/curso_es/pptx/S85.pptx
+++ b/curso_es/pptx/S85.pptx
@@ -4167,7 +4167,7 @@
                 </a:solidFill>
                 <a:latin typeface="Nunito Sans"/>
               </a:rPr>
-              <a:t>Al grupo de la familia de Kevin llega: «¡URGENTE! A los inmigrantes les dan miles de euros solo por llegar. Lo ha dicho un amigo que trabaja en el ayuntamiento. ¡Pásalo!».</a:t>
+              <a:t>Al grupo de la familia de un chico llega: «¡URGENTE! A los inmigrantes les dan miles de euros solo por llegar. Lo ha dicho un amigo que trabaja en el ayuntamiento. ¡Pásalo!».</a:t>
             </a:r>
           </a:p>
         </p:txBody>
@@ -4476,7 +4476,7 @@
                 </a:solidFill>
                 <a:latin typeface="Nunito Sans"/>
               </a:rPr>
-              <a:t>Aitor lee una noticia sobre un robo. El detenido nació en otro país. Aitor comenta: «Lo que yo decía: los de fuera vienen a robar».</a:t>
+              <a:t>Frase inventada, de las que se oyen por ahí. Vamos a ver por qué falla. Un chico lee una noticia sobre un robo. El detenido nació en otro país. Ese chico comenta: «Lo que yo decía: los de fuera vienen a robar».</a:t>
             </a:r>
           </a:p>
         </p:txBody>
@@ -4785,7 +4785,7 @@
                 </a:solidFill>
                 <a:latin typeface="Nunito Sans"/>
               </a:rPr>
-              <a:t>Naiara, harta de los comentarios contra los migrantes, escribe en un chat: «Pues los inmigrantes son todos buenísimos y muy trabajadores».</a:t>
+              <a:t>Una chica, harta de los comentarios contra los migrantes, escribe en un chat: «Pues los inmigrantes son todos buenísimos y muy trabajadores».</a:t>
             </a:r>
           </a:p>
         </p:txBody>
@@ -4833,7 +4833,7 @@
                 </a:solidFill>
                 <a:latin typeface="Nunito Sans"/>
               </a:rPr>
-              <a:t>Naiara defiende a los migrantes. ¿Está razonando bien?</a:t>
+              <a:t>Esa chica defiende a los migrantes. ¿Está razonando bien?</a:t>
             </a:r>
           </a:p>
           <a:p>
